--- a/Lectures/11-model-selection-and-validation-part-2.pptx
+++ b/Lectures/11-model-selection-and-validation-part-2.pptx
@@ -6,7 +6,7 @@
     <p:sldMasterId id="2147483660" r:id="rId2"/>
   </p:sldMasterIdLst>
   <p:notesMasterIdLst>
-    <p:notesMasterId r:id="rId43"/>
+    <p:notesMasterId r:id="rId39"/>
   </p:notesMasterIdLst>
   <p:sldIdLst>
     <p:sldId id="256" r:id="rId3"/>
@@ -43,12 +43,8 @@
     <p:sldId id="296" r:id="rId34"/>
     <p:sldId id="454" r:id="rId35"/>
     <p:sldId id="484" r:id="rId36"/>
-    <p:sldId id="488" r:id="rId37"/>
-    <p:sldId id="489" r:id="rId38"/>
-    <p:sldId id="490" r:id="rId39"/>
-    <p:sldId id="491" r:id="rId40"/>
-    <p:sldId id="492" r:id="rId41"/>
-    <p:sldId id="501" r:id="rId42"/>
+    <p:sldId id="492" r:id="rId37"/>
+    <p:sldId id="502" r:id="rId38"/>
   </p:sldIdLst>
   <p:sldSz cx="12192000" cy="6858000"/>
   <p:notesSz cx="6858000" cy="9144000"/>
@@ -286,7 +282,7 @@
       <p15:sldGuideLst xmlns:p15="http://schemas.microsoft.com/office/powerpoint/2012/main"/>
     </p:ext>
     <p:ext uri="http://customooxmlschemas.google.com/">
-      <go:slidesCustomData xmlns:go="http://customooxmlschemas.google.com/" xmlns:p15="http://schemas.microsoft.com/office/powerpoint/2012/main" xmlns:p14="http://schemas.microsoft.com/office/powerpoint/2010/main" xmlns:com="http://schemas.openxmlformats.org/drawingml/2006/compatibility" xmlns:pvml="urn:schemas-microsoft-com:office:powerpoint" xmlns:v="urn:schemas-microsoft-com:vml" xmlns:o="urn:schemas-microsoft-com:office:office" xmlns:dgm="http://schemas.openxmlformats.org/drawingml/2006/diagram" xmlns:c="http://schemas.openxmlformats.org/drawingml/2006/chart" xmlns:mv="urn:schemas-microsoft-com:mac:vml" xmlns:mc="http://schemas.openxmlformats.org/markup-compatibility/2006" xmlns="" r:id="rId44" roundtripDataSignature="AMtx7mjFyVUGRZWio+dc9dxzYsimUxNJbg=="/>
+      <go:slidesCustomData xmlns="" xmlns:mc="http://schemas.openxmlformats.org/markup-compatibility/2006" xmlns:mv="urn:schemas-microsoft-com:mac:vml" xmlns:c="http://schemas.openxmlformats.org/drawingml/2006/chart" xmlns:dgm="http://schemas.openxmlformats.org/drawingml/2006/diagram" xmlns:o="urn:schemas-microsoft-com:office:office" xmlns:v="urn:schemas-microsoft-com:vml" xmlns:pvml="urn:schemas-microsoft-com:office:powerpoint" xmlns:com="http://schemas.openxmlformats.org/drawingml/2006/compatibility" xmlns:p14="http://schemas.microsoft.com/office/powerpoint/2010/main" xmlns:p15="http://schemas.microsoft.com/office/powerpoint/2012/main" xmlns:go="http://customooxmlschemas.google.com/" r:id="rId44" roundtripDataSignature="AMtx7mjFyVUGRZWio+dc9dxzYsimUxNJbg=="/>
     </p:ext>
   </p:extLst>
 </p:presentation>
@@ -7341,7 +7337,7 @@
           <a:p>
             <a:fld id="{7C0312F8-2DE2-6B40-83C5-731724CAE2B0}" type="datetimeFigureOut">
               <a:rPr lang="en-US" smtClean="0"/>
-              <a:t>10/9/23</a:t>
+              <a:t>9/30/25</a:t>
             </a:fld>
             <a:endParaRPr lang="en-US"/>
           </a:p>
@@ -7436,7 +7432,7 @@
           <a:p>
             <a:fld id="{7C0312F8-2DE2-6B40-83C5-731724CAE2B0}" type="datetimeFigureOut">
               <a:rPr lang="en-US" smtClean="0"/>
-              <a:t>10/9/23</a:t>
+              <a:t>9/30/25</a:t>
             </a:fld>
             <a:endParaRPr lang="en-US"/>
           </a:p>
@@ -9428,7 +9424,7 @@
           <a:p>
             <a:fld id="{7C0312F8-2DE2-6B40-83C5-731724CAE2B0}" type="datetimeFigureOut">
               <a:rPr lang="en-US" smtClean="0"/>
-              <a:t>10/9/23</a:t>
+              <a:t>9/30/25</a:t>
             </a:fld>
             <a:endParaRPr lang="en-US"/>
           </a:p>
@@ -9713,7 +9709,7 @@
           <a:p>
             <a:fld id="{7C0312F8-2DE2-6B40-83C5-731724CAE2B0}" type="datetimeFigureOut">
               <a:rPr lang="en-US" smtClean="0"/>
-              <a:t>10/9/23</a:t>
+              <a:t>9/30/25</a:t>
             </a:fld>
             <a:endParaRPr lang="en-US"/>
           </a:p>
@@ -11190,7 +11186,7 @@
           <a:p>
             <a:fld id="{7C0312F8-2DE2-6B40-83C5-731724CAE2B0}" type="datetimeFigureOut">
               <a:rPr lang="en-US" smtClean="0"/>
-              <a:t>10/9/23</a:t>
+              <a:t>9/30/25</a:t>
             </a:fld>
             <a:endParaRPr lang="en-US"/>
           </a:p>
@@ -12437,7 +12433,7 @@
             </a:pPr>
             <a:r>
               <a:rPr lang="en-US" dirty="0"/>
-              <a:t>1: We want to track news coverage of epidemic related topics. We have tagged a small corpus (n=1000) of news articles from Jan 2019 to September 2020 and now have a stream of new incoming articles every day. We want to deploy a system that tells us something about intensity of coverage by media outlet going forward.</a:t>
+              <a:t>1: We want to track news coverage of epidemic related topics. We have tagged a small corpus (n=1000) of news articles from Jan 2019 to September 2025 and now have a stream of new incoming articles every day. We want to deploy a system that tells us something about intensity of coverage by media outlet going forward.</a:t>
             </a:r>
           </a:p>
           <a:p>
@@ -12571,7 +12567,7 @@
             </a:pPr>
             <a:r>
               <a:rPr lang="en-US" dirty="0"/>
-              <a:t>2: We want to track news coverage of epidemic related topics. We have tagged a small corpus (n=1000) of news articles from Jan 2019 to September 2020 and now have a stream of new incoming articles every day. We want to deploy a system that tells us something about intensity of coverage by media outlet over the last 2 years as well as going forward.</a:t>
+              <a:t>2: We want to track news coverage of epidemic related topics. We have tagged a small corpus (n=1000) of news articles from Jan 2019 to September 2025 and now have a stream of new incoming articles every day. We want to deploy a system that tells us something about intensity of coverage by media outlet over the last 6 years as well as going forward.</a:t>
             </a:r>
           </a:p>
           <a:p>
@@ -12975,7 +12971,12 @@
             <p:ph type="body" idx="1"/>
           </p:nvPr>
         </p:nvSpPr>
-        <p:spPr/>
+        <p:spPr>
+          <a:xfrm>
+            <a:off x="87682" y="1536633"/>
+            <a:ext cx="11688618" cy="4555200"/>
+          </a:xfrm>
+        </p:spPr>
         <p:txBody>
           <a:bodyPr/>
           <a:lstStyle/>
@@ -12992,13 +12993,13 @@
           <a:p>
             <a:r>
               <a:rPr lang="en-US" dirty="0"/>
-              <a:t>Project check-in on Wednesday </a:t>
+              <a:t>Project check-in on Wednesday (GHC 8023) Order: MCRT1, Bills3, Bills2, Bills1</a:t>
             </a:r>
           </a:p>
           <a:p>
             <a:r>
               <a:rPr lang="en-US" dirty="0"/>
-              <a:t>Project work time on Thursday</a:t>
+              <a:t>Temporal validation session on Thursday</a:t>
             </a:r>
           </a:p>
           <a:p>
@@ -13020,21 +13021,6 @@
             <a:r>
               <a:rPr lang="en-US" dirty="0"/>
               <a:t>Monday Feedback From</a:t>
-            </a:r>
-          </a:p>
-          <a:p>
-            <a:pPr lvl="1">
-              <a:spcBef>
-                <a:spcPts val="0"/>
-              </a:spcBef>
-            </a:pPr>
-            <a:r>
-              <a:rPr lang="en-US" sz="2400" dirty="0">
-                <a:solidFill>
-                  <a:srgbClr val="C00000"/>
-                </a:solidFill>
-              </a:rPr>
-              <a:t>Question: How is teamwork going so far?</a:t>
             </a:r>
           </a:p>
           <a:p>
@@ -28835,95 +28821,7 @@
           <a:p>
             <a:r>
               <a:rPr lang="en-US" dirty="0"/>
-              <a:t>Some Open Research Questions</a:t>
-            </a:r>
-          </a:p>
-        </p:txBody>
-      </p:sp>
-      <p:pic>
-        <p:nvPicPr>
-          <p:cNvPr id="6" name="Picture 5">
-            <a:extLst>
-              <a:ext uri="{FF2B5EF4-FFF2-40B4-BE49-F238E27FC236}">
-                <a16:creationId xmlns:a16="http://schemas.microsoft.com/office/drawing/2014/main" id="{4B9B5C17-6333-3542-BF92-961541BDC881}"/>
-              </a:ext>
-            </a:extLst>
-          </p:cNvPr>
-          <p:cNvPicPr>
-            <a:picLocks noChangeAspect="1"/>
-          </p:cNvPicPr>
-          <p:nvPr/>
-        </p:nvPicPr>
-        <p:blipFill>
-          <a:blip r:embed="rId2"/>
-          <a:stretch>
-            <a:fillRect/>
-          </a:stretch>
-        </p:blipFill>
-        <p:spPr>
-          <a:xfrm>
-            <a:off x="1169439" y="1257300"/>
-            <a:ext cx="9853121" cy="5023746"/>
-          </a:xfrm>
-          <a:prstGeom prst="rect">
-            <a:avLst/>
-          </a:prstGeom>
-        </p:spPr>
-      </p:pic>
-    </p:spTree>
-    <p:extLst>
-      <p:ext uri="{BB962C8B-B14F-4D97-AF65-F5344CB8AC3E}">
-        <p14:creationId xmlns:p14="http://schemas.microsoft.com/office/powerpoint/2010/main" val="1478637945"/>
-      </p:ext>
-    </p:extLst>
-  </p:cSld>
-  <p:clrMapOvr>
-    <a:masterClrMapping/>
-  </p:clrMapOvr>
-</p:sld>
-</file>
-
-<file path=ppt/slides/slide36.xml><?xml version="1.0" encoding="utf-8"?>
-<p:sld xmlns:a="http://schemas.openxmlformats.org/drawingml/2006/main" xmlns:r="http://schemas.openxmlformats.org/officeDocument/2006/relationships" xmlns:p="http://schemas.openxmlformats.org/presentationml/2006/main">
-  <p:cSld>
-    <p:spTree>
-      <p:nvGrpSpPr>
-        <p:cNvPr id="1" name=""/>
-        <p:cNvGrpSpPr/>
-        <p:nvPr/>
-      </p:nvGrpSpPr>
-      <p:grpSpPr>
-        <a:xfrm>
-          <a:off x="0" y="0"/>
-          <a:ext cx="0" cy="0"/>
-          <a:chOff x="0" y="0"/>
-          <a:chExt cx="0" cy="0"/>
-        </a:xfrm>
-      </p:grpSpPr>
-      <p:sp>
-        <p:nvSpPr>
-          <p:cNvPr id="3" name="Title 2">
-            <a:extLst>
-              <a:ext uri="{FF2B5EF4-FFF2-40B4-BE49-F238E27FC236}">
-                <a16:creationId xmlns:a16="http://schemas.microsoft.com/office/drawing/2014/main" id="{9323871C-7CA8-1448-8FFC-1AE6E1838941}"/>
-              </a:ext>
-            </a:extLst>
-          </p:cNvPr>
-          <p:cNvSpPr>
-            <a:spLocks noGrp="1"/>
-          </p:cNvSpPr>
-          <p:nvPr>
-            <p:ph type="title"/>
-          </p:nvPr>
-        </p:nvSpPr>
-        <p:spPr/>
-        <p:txBody>
-          <a:bodyPr/>
-          <a:lstStyle/>
-          <a:p>
-            <a:r>
-              <a:rPr lang="en-US" dirty="0"/>
-              <a:t>Some Open Research Questions</a:t>
+              <a:t>Discussion Question</a:t>
             </a:r>
           </a:p>
         </p:txBody>
@@ -28949,73 +28847,12 @@
           <a:bodyPr/>
           <a:lstStyle/>
           <a:p>
+            <a:pPr marL="76200" indent="0" algn="ctr">
+              <a:buNone/>
+            </a:pPr>
             <a:r>
-              <a:rPr lang="en-US" dirty="0"/>
-              <a:t>The SVM loss function will find the “best” separating hyperplane overall, but perhaps we could draw a better hyperplane to separate just </a:t>
-            </a:r>
-            <a:r>
-              <a:rPr lang="en-US" i="1" dirty="0"/>
-              <a:t>k</a:t>
-            </a:r>
-            <a:r>
-              <a:rPr lang="en-US" dirty="0"/>
-              <a:t> positive examples?</a:t>
-            </a:r>
-            <a:br>
-              <a:rPr lang="en-US" dirty="0"/>
-            </a:br>
-            <a:endParaRPr lang="en-US" dirty="0"/>
-          </a:p>
-          <a:p>
-            <a:r>
-              <a:rPr lang="en-US" i="1" dirty="0" err="1"/>
-              <a:t>Transductive</a:t>
-            </a:r>
-            <a:r>
-              <a:rPr lang="en-US" dirty="0"/>
-              <a:t> method: needs to be aware of the test set </a:t>
-            </a:r>
-            <a:r>
-              <a:rPr lang="en-US" b="1" dirty="0"/>
-              <a:t>without labels</a:t>
-            </a:r>
-            <a:r>
-              <a:rPr lang="en-US" dirty="0"/>
-              <a:t> to select just </a:t>
-            </a:r>
-            <a:r>
-              <a:rPr lang="en-US" i="1" dirty="0"/>
-              <a:t>k</a:t>
-            </a:r>
-            <a:r>
-              <a:rPr lang="en-US" dirty="0"/>
-              <a:t> test examples.</a:t>
-            </a:r>
-            <a:br>
-              <a:rPr lang="en-US" dirty="0"/>
-            </a:br>
-            <a:endParaRPr lang="en-US" dirty="0"/>
-          </a:p>
-          <a:p>
-            <a:r>
-              <a:rPr lang="en-US" dirty="0"/>
-              <a:t>Modified gradient descent procedure to project gradient direction for L2-regularized SVM loss onto a “feasible solution cone” such that </a:t>
-            </a:r>
-            <a:r>
-              <a:rPr lang="en-US" u="sng" dirty="0"/>
-              <a:t>no more than</a:t>
-            </a:r>
-            <a:r>
-              <a:rPr lang="en-US" dirty="0"/>
-              <a:t> </a:t>
-            </a:r>
-            <a:r>
-              <a:rPr lang="en-US" i="1" dirty="0"/>
-              <a:t>k</a:t>
-            </a:r>
-            <a:r>
-              <a:rPr lang="en-US" dirty="0"/>
-              <a:t> test examples will be predicted positive after the step.</a:t>
+              <a:rPr lang="en-US" sz="3600" dirty="0"/>
+              <a:t>What would be some potential strategies for integrating considerations around fairness in the process of model evaluation and selection?</a:t>
             </a:r>
           </a:p>
         </p:txBody>
@@ -29023,7 +28860,7 @@
     </p:spTree>
     <p:extLst>
       <p:ext uri="{BB962C8B-B14F-4D97-AF65-F5344CB8AC3E}">
-        <p14:creationId xmlns:p14="http://schemas.microsoft.com/office/powerpoint/2010/main" val="94907443"/>
+        <p14:creationId xmlns:p14="http://schemas.microsoft.com/office/powerpoint/2010/main" val="1535530279"/>
       </p:ext>
     </p:extLst>
   </p:cSld>
@@ -29033,12 +28870,18 @@
 </p:sld>
 </file>
 
-<file path=ppt/slides/slide37.xml><?xml version="1.0" encoding="utf-8"?>
+<file path=ppt/slides/slide36.xml><?xml version="1.0" encoding="utf-8"?>
 <p:sld xmlns:a="http://schemas.openxmlformats.org/drawingml/2006/main" xmlns:r="http://schemas.openxmlformats.org/officeDocument/2006/relationships" xmlns:p="http://schemas.openxmlformats.org/presentationml/2006/main">
   <p:cSld>
     <p:spTree>
       <p:nvGrpSpPr>
-        <p:cNvPr id="1" name=""/>
+        <p:cNvPr id="1" name="">
+          <a:extLst>
+            <a:ext uri="{FF2B5EF4-FFF2-40B4-BE49-F238E27FC236}">
+              <a16:creationId xmlns:a16="http://schemas.microsoft.com/office/drawing/2014/main" id="{3F91BEEE-212E-0B37-5DA5-D0D7B25E4111}"/>
+            </a:ext>
+          </a:extLst>
+        </p:cNvPr>
         <p:cNvGrpSpPr/>
         <p:nvPr/>
       </p:nvGrpSpPr>
@@ -29055,7 +28898,7 @@
           <p:cNvPr id="3" name="Title 2">
             <a:extLst>
               <a:ext uri="{FF2B5EF4-FFF2-40B4-BE49-F238E27FC236}">
-                <a16:creationId xmlns:a16="http://schemas.microsoft.com/office/drawing/2014/main" id="{9323871C-7CA8-1448-8FFC-1AE6E1838941}"/>
+                <a16:creationId xmlns:a16="http://schemas.microsoft.com/office/drawing/2014/main" id="{D3F200CA-41AC-6983-5E40-B6E233B5081C}"/>
               </a:ext>
             </a:extLst>
           </p:cNvPr>
@@ -29073,105 +28916,17 @@
           <a:p>
             <a:r>
               <a:rPr lang="en-US" dirty="0"/>
-              <a:t>Some Open Research Questions</a:t>
-            </a:r>
-          </a:p>
-        </p:txBody>
-      </p:sp>
-      <p:pic>
-        <p:nvPicPr>
-          <p:cNvPr id="2" name="Picture 1">
-            <a:extLst>
-              <a:ext uri="{FF2B5EF4-FFF2-40B4-BE49-F238E27FC236}">
-                <a16:creationId xmlns:a16="http://schemas.microsoft.com/office/drawing/2014/main" id="{23F8960D-806C-F441-9A23-1578C38467D8}"/>
-              </a:ext>
-            </a:extLst>
-          </p:cNvPr>
-          <p:cNvPicPr>
-            <a:picLocks noChangeAspect="1"/>
-          </p:cNvPicPr>
-          <p:nvPr/>
-        </p:nvPicPr>
-        <p:blipFill>
-          <a:blip r:embed="rId2"/>
-          <a:stretch>
-            <a:fillRect/>
-          </a:stretch>
-        </p:blipFill>
-        <p:spPr>
-          <a:xfrm>
-            <a:off x="2749550" y="1371600"/>
-            <a:ext cx="6692900" cy="4114800"/>
-          </a:xfrm>
-          <a:prstGeom prst="rect">
-            <a:avLst/>
-          </a:prstGeom>
-        </p:spPr>
-      </p:pic>
-    </p:spTree>
-    <p:extLst>
-      <p:ext uri="{BB962C8B-B14F-4D97-AF65-F5344CB8AC3E}">
-        <p14:creationId xmlns:p14="http://schemas.microsoft.com/office/powerpoint/2010/main" val="1715242992"/>
-      </p:ext>
-    </p:extLst>
-  </p:cSld>
-  <p:clrMapOvr>
-    <a:masterClrMapping/>
-  </p:clrMapOvr>
-</p:sld>
-</file>
-
-<file path=ppt/slides/slide38.xml><?xml version="1.0" encoding="utf-8"?>
-<p:sld xmlns:a="http://schemas.openxmlformats.org/drawingml/2006/main" xmlns:r="http://schemas.openxmlformats.org/officeDocument/2006/relationships" xmlns:p="http://schemas.openxmlformats.org/presentationml/2006/main">
-  <p:cSld>
-    <p:spTree>
-      <p:nvGrpSpPr>
-        <p:cNvPr id="1" name=""/>
-        <p:cNvGrpSpPr/>
-        <p:nvPr/>
-      </p:nvGrpSpPr>
-      <p:grpSpPr>
-        <a:xfrm>
-          <a:off x="0" y="0"/>
-          <a:ext cx="0" cy="0"/>
-          <a:chOff x="0" y="0"/>
-          <a:chExt cx="0" cy="0"/>
-        </a:xfrm>
-      </p:grpSpPr>
-      <p:sp>
-        <p:nvSpPr>
-          <p:cNvPr id="3" name="Title 2">
-            <a:extLst>
-              <a:ext uri="{FF2B5EF4-FFF2-40B4-BE49-F238E27FC236}">
-                <a16:creationId xmlns:a16="http://schemas.microsoft.com/office/drawing/2014/main" id="{9323871C-7CA8-1448-8FFC-1AE6E1838941}"/>
-              </a:ext>
-            </a:extLst>
-          </p:cNvPr>
-          <p:cNvSpPr>
-            <a:spLocks noGrp="1"/>
-          </p:cNvSpPr>
-          <p:nvPr>
-            <p:ph type="title"/>
-          </p:nvPr>
-        </p:nvSpPr>
-        <p:spPr/>
-        <p:txBody>
-          <a:bodyPr/>
-          <a:lstStyle/>
-          <a:p>
-            <a:r>
-              <a:rPr lang="en-US" dirty="0"/>
-              <a:t>Some Open Research Questions</a:t>
+              <a:t>Reminders</a:t>
             </a:r>
           </a:p>
         </p:txBody>
       </p:sp>
       <p:sp>
         <p:nvSpPr>
-          <p:cNvPr id="4" name="Text Placeholder 3">
+          <p:cNvPr id="5" name="Text Placeholder 4">
             <a:extLst>
               <a:ext uri="{FF2B5EF4-FFF2-40B4-BE49-F238E27FC236}">
-                <a16:creationId xmlns:a16="http://schemas.microsoft.com/office/drawing/2014/main" id="{5E600BA7-FA45-884F-9820-9E5F2CB7AA48}"/>
+                <a16:creationId xmlns:a16="http://schemas.microsoft.com/office/drawing/2014/main" id="{80FD5C10-B84F-B672-9D64-282A34EB8D9D}"/>
               </a:ext>
             </a:extLst>
           </p:cNvPr>
@@ -29184,8 +28939,8 @@
         </p:nvSpPr>
         <p:spPr>
           <a:xfrm>
-            <a:off x="415600" y="1219133"/>
-            <a:ext cx="11360700" cy="5234804"/>
+            <a:off x="87682" y="1536633"/>
+            <a:ext cx="11688618" cy="4555200"/>
           </a:xfrm>
         </p:spPr>
         <p:txBody>
@@ -29196,169 +28951,72 @@
               <a:buNone/>
             </a:pPr>
             <a:r>
-              <a:rPr lang="en-US" dirty="0"/>
-              <a:t>Paper shows improvements on synthetic examples and some “standard” datasets, but still more to investigate:</a:t>
+              <a:rPr lang="en-US" b="1" dirty="0"/>
+              <a:t>This week:</a:t>
             </a:r>
-            <a:br>
-              <a:rPr lang="en-US" dirty="0"/>
-            </a:br>
             <a:endParaRPr lang="en-US" dirty="0"/>
           </a:p>
           <a:p>
             <a:r>
               <a:rPr lang="en-US" dirty="0"/>
-              <a:t>Can be slow to converge on larger datasets</a:t>
+              <a:t>Project check-in on Wednesday (GHC 8023) Order: MCRT1, Bills3, Bills2, Bills1</a:t>
             </a:r>
-            <a:br>
-              <a:rPr lang="en-US" dirty="0"/>
-            </a:br>
-            <a:endParaRPr lang="en-US" dirty="0"/>
           </a:p>
           <a:p>
             <a:r>
               <a:rPr lang="en-US" dirty="0"/>
-              <a:t>“At most” </a:t>
+              <a:t>Temporal validation session on Thursday</a:t>
             </a:r>
+          </a:p>
+          <a:p>
+            <a:pPr marL="76200" indent="0">
+              <a:buNone/>
+            </a:pPr>
+            <a:endParaRPr lang="en-US" dirty="0"/>
+          </a:p>
+          <a:p>
+            <a:pPr marL="76200" indent="0">
+              <a:buNone/>
+            </a:pPr>
             <a:r>
-              <a:rPr lang="en-US" i="1" dirty="0"/>
-              <a:t>k</a:t>
+              <a:rPr lang="en-US" b="1" dirty="0"/>
+              <a:t>Coming up next week:</a:t>
             </a:r>
+          </a:p>
+          <a:p>
             <a:r>
               <a:rPr lang="en-US" dirty="0"/>
-              <a:t> examples can yield many fewer than the desired </a:t>
+              <a:t>Monday Feedback From</a:t>
             </a:r>
-            <a:r>
-              <a:rPr lang="en-US" i="1" dirty="0"/>
-              <a:t>k</a:t>
-            </a:r>
+          </a:p>
+          <a:p>
             <a:r>
               <a:rPr lang="en-US" dirty="0"/>
-              <a:t>, particularly for rare events (why doesn’t the algorithm target </a:t>
+              <a:t>Project Assignment due Monday – see template slides and canvas post</a:t>
             </a:r>
-            <a:r>
-              <a:rPr lang="en-US" i="1" dirty="0"/>
-              <a:t>exactly k</a:t>
-            </a:r>
-            <a:r>
-              <a:rPr lang="en-US" dirty="0"/>
-              <a:t>?)</a:t>
-            </a:r>
-            <a:br>
-              <a:rPr lang="en-US" dirty="0"/>
-            </a:br>
+          </a:p>
+          <a:p>
+            <a:pPr marL="76200" indent="0">
+              <a:buNone/>
+            </a:pPr>
+            <a:endParaRPr lang="en-US" dirty="0">
+              <a:solidFill>
+                <a:srgbClr val="C00000"/>
+              </a:solidFill>
+            </a:endParaRPr>
+          </a:p>
+          <a:p>
+            <a:pPr marL="76200" indent="0">
+              <a:buNone/>
+            </a:pPr>
             <a:endParaRPr lang="en-US" dirty="0"/>
-          </a:p>
-          <a:p>
-            <a:r>
-              <a:rPr lang="en-US" dirty="0"/>
-              <a:t> Although creating a “top k” boundary, still penalizes false positives and false negatives equally during optimization</a:t>
-            </a:r>
-            <a:br>
-              <a:rPr lang="en-US" dirty="0"/>
-            </a:br>
-            <a:endParaRPr lang="en-US" dirty="0"/>
-          </a:p>
-          <a:p>
-            <a:r>
-              <a:rPr lang="en-US" dirty="0"/>
-              <a:t>Can we do better at the top, even if we don’t have access to the test list?</a:t>
-            </a:r>
           </a:p>
         </p:txBody>
       </p:sp>
     </p:spTree>
     <p:extLst>
       <p:ext uri="{BB962C8B-B14F-4D97-AF65-F5344CB8AC3E}">
-        <p14:creationId xmlns:p14="http://schemas.microsoft.com/office/powerpoint/2010/main" val="4118118316"/>
-      </p:ext>
-    </p:extLst>
-  </p:cSld>
-  <p:clrMapOvr>
-    <a:masterClrMapping/>
-  </p:clrMapOvr>
-</p:sld>
-</file>
-
-<file path=ppt/slides/slide39.xml><?xml version="1.0" encoding="utf-8"?>
-<p:sld xmlns:a="http://schemas.openxmlformats.org/drawingml/2006/main" xmlns:r="http://schemas.openxmlformats.org/officeDocument/2006/relationships" xmlns:p="http://schemas.openxmlformats.org/presentationml/2006/main">
-  <p:cSld>
-    <p:spTree>
-      <p:nvGrpSpPr>
-        <p:cNvPr id="1" name=""/>
-        <p:cNvGrpSpPr/>
-        <p:nvPr/>
-      </p:nvGrpSpPr>
-      <p:grpSpPr>
-        <a:xfrm>
-          <a:off x="0" y="0"/>
-          <a:ext cx="0" cy="0"/>
-          <a:chOff x="0" y="0"/>
-          <a:chExt cx="0" cy="0"/>
-        </a:xfrm>
-      </p:grpSpPr>
-      <p:sp>
-        <p:nvSpPr>
-          <p:cNvPr id="3" name="Title 2">
-            <a:extLst>
-              <a:ext uri="{FF2B5EF4-FFF2-40B4-BE49-F238E27FC236}">
-                <a16:creationId xmlns:a16="http://schemas.microsoft.com/office/drawing/2014/main" id="{9323871C-7CA8-1448-8FFC-1AE6E1838941}"/>
-              </a:ext>
-            </a:extLst>
-          </p:cNvPr>
-          <p:cNvSpPr>
-            <a:spLocks noGrp="1"/>
-          </p:cNvSpPr>
-          <p:nvPr>
-            <p:ph type="title"/>
-          </p:nvPr>
-        </p:nvSpPr>
-        <p:spPr/>
-        <p:txBody>
-          <a:bodyPr/>
-          <a:lstStyle/>
-          <a:p>
-            <a:r>
-              <a:rPr lang="en-US" dirty="0"/>
-              <a:t>Discussion Question</a:t>
-            </a:r>
-          </a:p>
-        </p:txBody>
-      </p:sp>
-      <p:sp>
-        <p:nvSpPr>
-          <p:cNvPr id="4" name="Text Placeholder 3">
-            <a:extLst>
-              <a:ext uri="{FF2B5EF4-FFF2-40B4-BE49-F238E27FC236}">
-                <a16:creationId xmlns:a16="http://schemas.microsoft.com/office/drawing/2014/main" id="{5E600BA7-FA45-884F-9820-9E5F2CB7AA48}"/>
-              </a:ext>
-            </a:extLst>
-          </p:cNvPr>
-          <p:cNvSpPr>
-            <a:spLocks noGrp="1"/>
-          </p:cNvSpPr>
-          <p:nvPr>
-            <p:ph type="body" idx="1"/>
-          </p:nvPr>
-        </p:nvSpPr>
-        <p:spPr/>
-        <p:txBody>
-          <a:bodyPr/>
-          <a:lstStyle/>
-          <a:p>
-            <a:pPr marL="76200" indent="0" algn="ctr">
-              <a:buNone/>
-            </a:pPr>
-            <a:r>
-              <a:rPr lang="en-US" sz="3600" dirty="0"/>
-              <a:t>What would be some potential strategies for integrating considerations around fairness in the process of model evaluation and selection?</a:t>
-            </a:r>
-          </a:p>
-        </p:txBody>
-      </p:sp>
-    </p:spTree>
-    <p:extLst>
-      <p:ext uri="{BB962C8B-B14F-4D97-AF65-F5344CB8AC3E}">
-        <p14:creationId xmlns:p14="http://schemas.microsoft.com/office/powerpoint/2010/main" val="1535530279"/>
+        <p14:creationId xmlns:p14="http://schemas.microsoft.com/office/powerpoint/2010/main" val="3537405817"/>
       </p:ext>
     </p:extLst>
   </p:cSld>
@@ -29490,169 +29148,6 @@
     <p:extLst>
       <p:ext uri="{BB962C8B-B14F-4D97-AF65-F5344CB8AC3E}">
         <p14:creationId xmlns:p14="http://schemas.microsoft.com/office/powerpoint/2010/main" val="517800727"/>
-      </p:ext>
-    </p:extLst>
-  </p:cSld>
-  <p:clrMapOvr>
-    <a:masterClrMapping/>
-  </p:clrMapOvr>
-</p:sld>
-</file>
-
-<file path=ppt/slides/slide40.xml><?xml version="1.0" encoding="utf-8"?>
-<p:sld xmlns:a="http://schemas.openxmlformats.org/drawingml/2006/main" xmlns:r="http://schemas.openxmlformats.org/officeDocument/2006/relationships" xmlns:p="http://schemas.openxmlformats.org/presentationml/2006/main">
-  <p:cSld>
-    <p:spTree>
-      <p:nvGrpSpPr>
-        <p:cNvPr id="1" name=""/>
-        <p:cNvGrpSpPr/>
-        <p:nvPr/>
-      </p:nvGrpSpPr>
-      <p:grpSpPr>
-        <a:xfrm>
-          <a:off x="0" y="0"/>
-          <a:ext cx="0" cy="0"/>
-          <a:chOff x="0" y="0"/>
-          <a:chExt cx="0" cy="0"/>
-        </a:xfrm>
-      </p:grpSpPr>
-      <p:sp>
-        <p:nvSpPr>
-          <p:cNvPr id="3" name="Title 2">
-            <a:extLst>
-              <a:ext uri="{FF2B5EF4-FFF2-40B4-BE49-F238E27FC236}">
-                <a16:creationId xmlns:a16="http://schemas.microsoft.com/office/drawing/2014/main" id="{9323871C-7CA8-1448-8FFC-1AE6E1838941}"/>
-              </a:ext>
-            </a:extLst>
-          </p:cNvPr>
-          <p:cNvSpPr>
-            <a:spLocks noGrp="1"/>
-          </p:cNvSpPr>
-          <p:nvPr>
-            <p:ph type="title"/>
-          </p:nvPr>
-        </p:nvSpPr>
-        <p:spPr/>
-        <p:txBody>
-          <a:bodyPr/>
-          <a:lstStyle/>
-          <a:p>
-            <a:r>
-              <a:rPr lang="en-US" dirty="0"/>
-              <a:t>Reminders</a:t>
-            </a:r>
-          </a:p>
-        </p:txBody>
-      </p:sp>
-      <p:sp>
-        <p:nvSpPr>
-          <p:cNvPr id="5" name="Text Placeholder 4">
-            <a:extLst>
-              <a:ext uri="{FF2B5EF4-FFF2-40B4-BE49-F238E27FC236}">
-                <a16:creationId xmlns:a16="http://schemas.microsoft.com/office/drawing/2014/main" id="{F4E0A5F0-1D89-954D-91FB-596CD9E690F2}"/>
-              </a:ext>
-            </a:extLst>
-          </p:cNvPr>
-          <p:cNvSpPr>
-            <a:spLocks noGrp="1"/>
-          </p:cNvSpPr>
-          <p:nvPr>
-            <p:ph type="body" idx="1"/>
-          </p:nvPr>
-        </p:nvSpPr>
-        <p:spPr/>
-        <p:txBody>
-          <a:bodyPr/>
-          <a:lstStyle/>
-          <a:p>
-            <a:pPr marL="76200" indent="0">
-              <a:buNone/>
-            </a:pPr>
-            <a:r>
-              <a:rPr lang="en-US" b="1" dirty="0"/>
-              <a:t>This week:</a:t>
-            </a:r>
-            <a:endParaRPr lang="en-US" dirty="0"/>
-          </a:p>
-          <a:p>
-            <a:r>
-              <a:rPr lang="en-US" dirty="0"/>
-              <a:t>Project check-in on Wednesday (we’ll send around times/locations)</a:t>
-            </a:r>
-          </a:p>
-          <a:p>
-            <a:r>
-              <a:rPr lang="en-US" dirty="0"/>
-              <a:t>Temporal Validation “whiteboard” session </a:t>
-            </a:r>
-            <a:r>
-              <a:rPr lang="en-US" dirty="0">
-                <a:solidFill>
-                  <a:srgbClr val="C00000"/>
-                </a:solidFill>
-              </a:rPr>
-              <a:t>Thursday</a:t>
-            </a:r>
-          </a:p>
-          <a:p>
-            <a:r>
-              <a:rPr lang="en-US" dirty="0"/>
-              <a:t>Project Assignment due on Friday – see template slides and canvas post</a:t>
-            </a:r>
-          </a:p>
-          <a:p>
-            <a:pPr marL="76200" indent="0">
-              <a:buNone/>
-            </a:pPr>
-            <a:endParaRPr lang="en-US" dirty="0"/>
-          </a:p>
-          <a:p>
-            <a:pPr marL="76200" indent="0">
-              <a:buNone/>
-            </a:pPr>
-            <a:r>
-              <a:rPr lang="en-US" b="1" dirty="0"/>
-              <a:t>Coming up next week:</a:t>
-            </a:r>
-          </a:p>
-          <a:p>
-            <a:r>
-              <a:rPr lang="en-US" dirty="0"/>
-              <a:t>Monday Feedback From</a:t>
-            </a:r>
-          </a:p>
-          <a:p>
-            <a:pPr lvl="1">
-              <a:spcBef>
-                <a:spcPts val="0"/>
-              </a:spcBef>
-            </a:pPr>
-            <a:r>
-              <a:rPr lang="en-US" sz="2400" dirty="0">
-                <a:solidFill>
-                  <a:srgbClr val="C00000"/>
-                </a:solidFill>
-              </a:rPr>
-              <a:t>Question: How is teamwork going so far?</a:t>
-            </a:r>
-            <a:endParaRPr lang="en-US" dirty="0">
-              <a:solidFill>
-                <a:srgbClr val="C00000"/>
-              </a:solidFill>
-            </a:endParaRPr>
-          </a:p>
-          <a:p>
-            <a:pPr marL="76200" indent="0">
-              <a:buNone/>
-            </a:pPr>
-            <a:endParaRPr lang="en-US" dirty="0"/>
-          </a:p>
-        </p:txBody>
-      </p:sp>
-    </p:spTree>
-    <p:extLst>
-      <p:ext uri="{BB962C8B-B14F-4D97-AF65-F5344CB8AC3E}">
-        <p14:creationId xmlns:p14="http://schemas.microsoft.com/office/powerpoint/2010/main" val="2770981367"/>
       </p:ext>
     </p:extLst>
   </p:cSld>

--- a/Lectures/11-model-selection-and-validation-part-2.pptx
+++ b/Lectures/11-model-selection-and-validation-part-2.pptx
@@ -29867,7 +29867,7 @@
           <p:spPr>
             <a:xfrm>
               <a:off x="312283" y="5550212"/>
-              <a:ext cx="986167" cy="369332"/>
+              <a:ext cx="1016240" cy="369332"/>
             </a:xfrm>
             <a:prstGeom prst="rect">
               <a:avLst/>
@@ -29884,7 +29884,7 @@
                 <a:buClrTx/>
               </a:pPr>
               <a:r>
-                <a:rPr lang="en-US" sz="1800" b="1" kern="1200" dirty="0">
+                <a:rPr lang="en-US" sz="1800" b="1" kern="1200" dirty="0" err="1">
                   <a:solidFill>
                     <a:srgbClr val="C00000"/>
                   </a:solidFill>
@@ -29892,8 +29892,16 @@
                   <a:ea typeface="+mn-ea"/>
                   <a:cs typeface="+mn-cs"/>
                 </a:rPr>
-                <a:t>Baseline</a:t>
+                <a:t>Baserate</a:t>
               </a:r>
+              <a:endParaRPr lang="en-US" sz="1800" b="1" kern="1200" dirty="0">
+                <a:solidFill>
+                  <a:srgbClr val="C00000"/>
+                </a:solidFill>
+                <a:latin typeface="Calibri"/>
+                <a:ea typeface="+mn-ea"/>
+                <a:cs typeface="+mn-cs"/>
+              </a:endParaRPr>
             </a:p>
           </p:txBody>
         </p:sp>
@@ -29913,8 +29921,8 @@
           </p:nvCxnSpPr>
           <p:spPr>
             <a:xfrm>
-              <a:off x="1298450" y="5734878"/>
-              <a:ext cx="281872" cy="0"/>
+              <a:off x="1328523" y="5734878"/>
+              <a:ext cx="251799" cy="0"/>
             </a:xfrm>
             <a:prstGeom prst="straightConnector1">
               <a:avLst/>

--- a/Lectures/11-model-selection-and-validation-part-2.pptx
+++ b/Lectures/11-model-selection-and-validation-part-2.pptx
@@ -282,7 +282,7 @@
       <p15:sldGuideLst xmlns:p15="http://schemas.microsoft.com/office/powerpoint/2012/main"/>
     </p:ext>
     <p:ext uri="http://customooxmlschemas.google.com/">
-      <go:slidesCustomData xmlns="" xmlns:mc="http://schemas.openxmlformats.org/markup-compatibility/2006" xmlns:mv="urn:schemas-microsoft-com:mac:vml" xmlns:c="http://schemas.openxmlformats.org/drawingml/2006/chart" xmlns:dgm="http://schemas.openxmlformats.org/drawingml/2006/diagram" xmlns:o="urn:schemas-microsoft-com:office:office" xmlns:v="urn:schemas-microsoft-com:vml" xmlns:pvml="urn:schemas-microsoft-com:office:powerpoint" xmlns:com="http://schemas.openxmlformats.org/drawingml/2006/compatibility" xmlns:p14="http://schemas.microsoft.com/office/powerpoint/2010/main" xmlns:p15="http://schemas.microsoft.com/office/powerpoint/2012/main" xmlns:go="http://customooxmlschemas.google.com/" r:id="rId44" roundtripDataSignature="AMtx7mjFyVUGRZWio+dc9dxzYsimUxNJbg=="/>
+      <go:slidesCustomData xmlns:go="http://customooxmlschemas.google.com/" xmlns:p15="http://schemas.microsoft.com/office/powerpoint/2012/main" xmlns:p14="http://schemas.microsoft.com/office/powerpoint/2010/main" xmlns:com="http://schemas.openxmlformats.org/drawingml/2006/compatibility" xmlns:pvml="urn:schemas-microsoft-com:office:powerpoint" xmlns:v="urn:schemas-microsoft-com:vml" xmlns:o="urn:schemas-microsoft-com:office:office" xmlns:dgm="http://schemas.openxmlformats.org/drawingml/2006/diagram" xmlns:c="http://schemas.openxmlformats.org/drawingml/2006/chart" xmlns:mv="urn:schemas-microsoft-com:mac:vml" xmlns:mc="http://schemas.openxmlformats.org/markup-compatibility/2006" xmlns="" r:id="rId44" roundtripDataSignature="AMtx7mjFyVUGRZWio+dc9dxzYsimUxNJbg=="/>
     </p:ext>
   </p:extLst>
 </p:presentation>
@@ -7337,7 +7337,7 @@
           <a:p>
             <a:fld id="{7C0312F8-2DE2-6B40-83C5-731724CAE2B0}" type="datetimeFigureOut">
               <a:rPr lang="en-US" smtClean="0"/>
-              <a:t>9/30/25</a:t>
+              <a:t>10/6/25</a:t>
             </a:fld>
             <a:endParaRPr lang="en-US"/>
           </a:p>
@@ -7432,7 +7432,7 @@
           <a:p>
             <a:fld id="{7C0312F8-2DE2-6B40-83C5-731724CAE2B0}" type="datetimeFigureOut">
               <a:rPr lang="en-US" smtClean="0"/>
-              <a:t>9/30/25</a:t>
+              <a:t>10/6/25</a:t>
             </a:fld>
             <a:endParaRPr lang="en-US"/>
           </a:p>
@@ -9424,7 +9424,7 @@
           <a:p>
             <a:fld id="{7C0312F8-2DE2-6B40-83C5-731724CAE2B0}" type="datetimeFigureOut">
               <a:rPr lang="en-US" smtClean="0"/>
-              <a:t>9/30/25</a:t>
+              <a:t>10/6/25</a:t>
             </a:fld>
             <a:endParaRPr lang="en-US"/>
           </a:p>
@@ -9709,7 +9709,7 @@
           <a:p>
             <a:fld id="{7C0312F8-2DE2-6B40-83C5-731724CAE2B0}" type="datetimeFigureOut">
               <a:rPr lang="en-US" smtClean="0"/>
-              <a:t>9/30/25</a:t>
+              <a:t>10/6/25</a:t>
             </a:fld>
             <a:endParaRPr lang="en-US"/>
           </a:p>
@@ -11186,7 +11186,7 @@
           <a:p>
             <a:fld id="{7C0312F8-2DE2-6B40-83C5-731724CAE2B0}" type="datetimeFigureOut">
               <a:rPr lang="en-US" smtClean="0"/>
-              <a:t>9/30/25</a:t>
+              <a:t>10/6/25</a:t>
             </a:fld>
             <a:endParaRPr lang="en-US"/>
           </a:p>
@@ -13227,51 +13227,6 @@
           <a:chExt cx="0" cy="0"/>
         </a:xfrm>
       </p:grpSpPr>
-      <p:pic>
-        <p:nvPicPr>
-          <p:cNvPr id="1026" name="Picture 2" descr="img">
-            <a:extLst>
-              <a:ext uri="{FF2B5EF4-FFF2-40B4-BE49-F238E27FC236}">
-                <a16:creationId xmlns:a16="http://schemas.microsoft.com/office/drawing/2014/main" id="{B0366070-7513-EA4F-8DAA-A5F0BFA2D273}"/>
-              </a:ext>
-            </a:extLst>
-          </p:cNvPr>
-          <p:cNvPicPr>
-            <a:picLocks noChangeAspect="1" noChangeArrowheads="1"/>
-          </p:cNvPicPr>
-          <p:nvPr/>
-        </p:nvPicPr>
-        <p:blipFill rotWithShape="1">
-          <a:blip r:embed="rId2">
-            <a:extLst>
-              <a:ext uri="{28A0092B-C50C-407E-A947-70E740481C1C}">
-                <a14:useLocalDpi xmlns:a14="http://schemas.microsoft.com/office/drawing/2010/main" val="0"/>
-              </a:ext>
-            </a:extLst>
-          </a:blip>
-          <a:srcRect l="11856" t="9859" r="9516" b="10303"/>
-          <a:stretch/>
-        </p:blipFill>
-        <p:spPr bwMode="auto">
-          <a:xfrm>
-            <a:off x="4419600" y="995516"/>
-            <a:ext cx="7772402" cy="4866967"/>
-          </a:xfrm>
-          <a:prstGeom prst="rect">
-            <a:avLst/>
-          </a:prstGeom>
-          <a:noFill/>
-          <a:extLst>
-            <a:ext uri="{909E8E84-426E-40DD-AFC4-6F175D3DCCD1}">
-              <a14:hiddenFill xmlns:a14="http://schemas.microsoft.com/office/drawing/2010/main">
-                <a:solidFill>
-                  <a:srgbClr val="FFFFFF"/>
-                </a:solidFill>
-              </a14:hiddenFill>
-            </a:ext>
-          </a:extLst>
-        </p:spPr>
-      </p:pic>
       <p:sp>
         <p:nvSpPr>
           <p:cNvPr id="4" name="TextBox 3">
@@ -13309,10 +13264,40 @@
       </p:sp>
       <p:pic>
         <p:nvPicPr>
-          <p:cNvPr id="5" name="Picture 4">
+          <p:cNvPr id="2" name="Picture 1">
             <a:extLst>
               <a:ext uri="{FF2B5EF4-FFF2-40B4-BE49-F238E27FC236}">
-                <a16:creationId xmlns:a16="http://schemas.microsoft.com/office/drawing/2014/main" id="{E752B697-97D8-C045-A58D-BDC94728CEC5}"/>
+                <a16:creationId xmlns:a16="http://schemas.microsoft.com/office/drawing/2014/main" id="{5AA66AF8-5911-C4C0-8FEE-37A63809EF1E}"/>
+              </a:ext>
+            </a:extLst>
+          </p:cNvPr>
+          <p:cNvPicPr>
+            <a:picLocks noChangeAspect="1"/>
+          </p:cNvPicPr>
+          <p:nvPr/>
+        </p:nvPicPr>
+        <p:blipFill>
+          <a:blip r:embed="rId2"/>
+          <a:stretch>
+            <a:fillRect/>
+          </a:stretch>
+        </p:blipFill>
+        <p:spPr>
+          <a:xfrm>
+            <a:off x="0" y="995516"/>
+            <a:ext cx="4995772" cy="5862484"/>
+          </a:xfrm>
+          <a:prstGeom prst="rect">
+            <a:avLst/>
+          </a:prstGeom>
+        </p:spPr>
+      </p:pic>
+      <p:pic>
+        <p:nvPicPr>
+          <p:cNvPr id="3" name="Picture 2">
+            <a:extLst>
+              <a:ext uri="{FF2B5EF4-FFF2-40B4-BE49-F238E27FC236}">
+                <a16:creationId xmlns:a16="http://schemas.microsoft.com/office/drawing/2014/main" id="{C7E8F66F-F4C4-8A4B-BD28-D3552AF8B841}"/>
               </a:ext>
             </a:extLst>
           </p:cNvPr>
@@ -13329,8 +13314,8 @@
         </p:blipFill>
         <p:spPr>
           <a:xfrm>
-            <a:off x="0" y="1492249"/>
-            <a:ext cx="4419600" cy="3873500"/>
+            <a:off x="4419600" y="1682109"/>
+            <a:ext cx="7772400" cy="3493782"/>
           </a:xfrm>
           <a:prstGeom prst="rect">
             <a:avLst/>
